--- a/2026-03-07_늘푸른교회_.pptx
+++ b/2026-03-07_늘푸른교회_.pptx
@@ -150,6 +150,19 @@
     <p:sldId id="398" r:id="rId149"/>
     <p:sldId id="399" r:id="rId150"/>
     <p:sldId id="400" r:id="rId151"/>
+    <p:sldId id="401" r:id="rId152"/>
+    <p:sldId id="402" r:id="rId153"/>
+    <p:sldId id="403" r:id="rId154"/>
+    <p:sldId id="404" r:id="rId155"/>
+    <p:sldId id="405" r:id="rId156"/>
+    <p:sldId id="406" r:id="rId157"/>
+    <p:sldId id="407" r:id="rId158"/>
+    <p:sldId id="408" r:id="rId159"/>
+    <p:sldId id="409" r:id="rId160"/>
+    <p:sldId id="410" r:id="rId161"/>
+    <p:sldId id="411" r:id="rId162"/>
+    <p:sldId id="412" r:id="rId163"/>
+    <p:sldId id="413" r:id="rId164"/>
   </p:sldIdLst>
   <p:sldSz cx="12192119" cy="6858000" type="screen4x3"/>
   <p:notesSz cx="6858000" cy="9144000"/>
@@ -4535,7 +4548,7 @@
               </a:defRPr>
             </a:pPr>
             <a:r>
-              <a:t>약할 때 강함 되시네 나의 보배가 되신 주 주 나의 모든 것</a:t>
+              <a:t>할 수 있다 하신 이는 나의 능력 주 하나님</a:t>
             </a:r>
           </a:p>
         </p:txBody>
@@ -4573,7 +4586,7 @@
               </a:defRPr>
             </a:pPr>
             <a:r>
-              <a:t>약할 때 강함 되시네</a:t>
+              <a:t>할 수 있다 하신 이</a:t>
             </a:r>
           </a:p>
         </p:txBody>
@@ -4637,7 +4650,7 @@
               </a:defRPr>
             </a:pPr>
             <a:r>
-              <a:t>주 안에 있는 보물을 나는 포기할 수 없네 주 나의 모든 것</a:t>
+              <a:t>의심 말라 하시고 물결 위 걸으라 하시네</a:t>
             </a:r>
           </a:p>
         </p:txBody>
@@ -4701,7 +4714,7 @@
               </a:defRPr>
             </a:pPr>
             <a:r>
-              <a:t>예수 어린양 존귀한 이름 예수 어린양 존귀한 이름</a:t>
+              <a:t>할 수 있다 하신 주 할 수 있다 하신 주</a:t>
             </a:r>
           </a:p>
         </p:txBody>
@@ -4765,7 +4778,7 @@
               </a:defRPr>
             </a:pPr>
             <a:r>
-              <a:t>십자가 죄 사하셨네 주님의 이름 찬양해 주 나의 모든 것</a:t>
+              <a:t>믿음 만이 믿음 만이 능력이라 하시네</a:t>
             </a:r>
           </a:p>
         </p:txBody>
@@ -4893,7 +4906,7 @@
               </a:defRPr>
             </a:pPr>
             <a:r>
-              <a:t>쓰러진 나를 세우고  나의 빈 잔을 채우네 주 나의 모든 것</a:t>
+              <a:t>믿음 만이 믿음 만이 능력이라 하시네</a:t>
             </a:r>
           </a:p>
         </p:txBody>
@@ -4957,7 +4970,7 @@
               </a:defRPr>
             </a:pPr>
             <a:r>
-              <a:t>예수 어린양 존귀한 이름 예수 어린양 존귀한 이름</a:t>
+              <a:t>할 수 있다 하신 이는 나의 능력 주 하나님</a:t>
             </a:r>
           </a:p>
         </p:txBody>
@@ -5021,7 +5034,7 @@
               </a:defRPr>
             </a:pPr>
             <a:r>
-              <a:t>예수 어린양 존귀한 이름 예수 어린양 존귀한 이름</a:t>
+              <a:t>나를 바라보시고 능력 준다 하시네</a:t>
             </a:r>
           </a:p>
         </p:txBody>
@@ -5052,6 +5065,44 @@
         <p:nvPr/>
       </p:nvGrpSpPr>
       <p:grpSpPr/>
+      <p:sp>
+        <p:nvSpPr>
+          <p:cNvPr id="2" name="TextBox 1"/>
+          <p:cNvSpPr txBox="1"/>
+          <p:nvPr/>
+        </p:nvSpPr>
+        <p:spPr>
+          <a:xfrm>
+            <a:off x="624059" y="5400000"/>
+            <a:ext cx="10944000" cy="1188000"/>
+          </a:xfrm>
+          <a:prstGeom prst="rect">
+            <a:avLst/>
+          </a:prstGeom>
+          <a:solidFill>
+            <a:srgbClr val="203864"/>
+          </a:solidFill>
+        </p:spPr>
+        <p:txBody>
+          <a:bodyPr wrap="none" anchor="ctr">
+            <a:normAutofit/>
+          </a:bodyPr>
+          <a:lstStyle/>
+          <a:p>
+            <a:pPr algn="ctr">
+              <a:defRPr sz="3500">
+                <a:solidFill>
+                  <a:srgbClr val="FFFFFF"/>
+                </a:solidFill>
+                <a:latin typeface="Pretendard Semibold"/>
+              </a:defRPr>
+            </a:pPr>
+            <a:r>
+              <a:t>할 수 있다 하신 주 할 수 있다 하신 주</a:t>
+            </a:r>
+          </a:p>
+        </p:txBody>
+      </p:sp>
     </p:spTree>
   </p:cSld>
   <p:clrMapOvr>
@@ -5061,6 +5112,864 @@
 </file>
 
 <file path=ppt/slides/slide124.xml><?xml version="1.0" encoding="utf-8"?>
+<p:sld xmlns:a="http://schemas.openxmlformats.org/drawingml/2006/main" xmlns:p="http://schemas.openxmlformats.org/presentationml/2006/main" xmlns:r="http://schemas.openxmlformats.org/officeDocument/2006/relationships">
+  <p:cSld>
+    <p:bg>
+      <p:bgPr>
+        <a:solidFill>
+          <a:srgbClr val="00FF00"/>
+        </a:solidFill>
+        <a:effectLst/>
+      </p:bgPr>
+    </p:bg>
+    <p:spTree>
+      <p:nvGrpSpPr>
+        <p:cNvPr id="1" name=""/>
+        <p:cNvGrpSpPr/>
+        <p:nvPr/>
+      </p:nvGrpSpPr>
+      <p:grpSpPr/>
+      <p:sp>
+        <p:nvSpPr>
+          <p:cNvPr id="2" name="TextBox 1"/>
+          <p:cNvSpPr txBox="1"/>
+          <p:nvPr/>
+        </p:nvSpPr>
+        <p:spPr>
+          <a:xfrm>
+            <a:off x="624059" y="5400000"/>
+            <a:ext cx="10944000" cy="1188000"/>
+          </a:xfrm>
+          <a:prstGeom prst="rect">
+            <a:avLst/>
+          </a:prstGeom>
+          <a:solidFill>
+            <a:srgbClr val="203864"/>
+          </a:solidFill>
+        </p:spPr>
+        <p:txBody>
+          <a:bodyPr wrap="none" anchor="ctr">
+            <a:normAutofit/>
+          </a:bodyPr>
+          <a:lstStyle/>
+          <a:p>
+            <a:pPr algn="ctr">
+              <a:defRPr sz="3500">
+                <a:solidFill>
+                  <a:srgbClr val="FFFFFF"/>
+                </a:solidFill>
+                <a:latin typeface="Pretendard Semibold"/>
+              </a:defRPr>
+            </a:pPr>
+            <a:r>
+              <a:t>사랑 만이 사랑 만이 능력이라 하시네</a:t>
+            </a:r>
+          </a:p>
+        </p:txBody>
+      </p:sp>
+    </p:spTree>
+  </p:cSld>
+  <p:clrMapOvr>
+    <a:masterClrMapping/>
+  </p:clrMapOvr>
+</p:sld>
+</file>
+
+<file path=ppt/slides/slide125.xml><?xml version="1.0" encoding="utf-8"?>
+<p:sld xmlns:a="http://schemas.openxmlformats.org/drawingml/2006/main" xmlns:p="http://schemas.openxmlformats.org/presentationml/2006/main" xmlns:r="http://schemas.openxmlformats.org/officeDocument/2006/relationships">
+  <p:cSld>
+    <p:bg>
+      <p:bgPr>
+        <a:solidFill>
+          <a:srgbClr val="00FF00"/>
+        </a:solidFill>
+        <a:effectLst/>
+      </p:bgPr>
+    </p:bg>
+    <p:spTree>
+      <p:nvGrpSpPr>
+        <p:cNvPr id="1" name=""/>
+        <p:cNvGrpSpPr/>
+        <p:nvPr/>
+      </p:nvGrpSpPr>
+      <p:grpSpPr/>
+      <p:sp>
+        <p:nvSpPr>
+          <p:cNvPr id="2" name="TextBox 1"/>
+          <p:cNvSpPr txBox="1"/>
+          <p:nvPr/>
+        </p:nvSpPr>
+        <p:spPr>
+          <a:xfrm>
+            <a:off x="624059" y="5400000"/>
+            <a:ext cx="10944000" cy="1188000"/>
+          </a:xfrm>
+          <a:prstGeom prst="rect">
+            <a:avLst/>
+          </a:prstGeom>
+          <a:solidFill>
+            <a:srgbClr val="203864"/>
+          </a:solidFill>
+        </p:spPr>
+        <p:txBody>
+          <a:bodyPr wrap="none" anchor="ctr">
+            <a:normAutofit/>
+          </a:bodyPr>
+          <a:lstStyle/>
+          <a:p>
+            <a:pPr algn="ctr">
+              <a:defRPr sz="3500">
+                <a:solidFill>
+                  <a:srgbClr val="FFFFFF"/>
+                </a:solidFill>
+                <a:latin typeface="Pretendard Semibold"/>
+              </a:defRPr>
+            </a:pPr>
+            <a:r>
+              <a:t>사랑 만이 사랑 만이 능력이라 하시네</a:t>
+            </a:r>
+          </a:p>
+        </p:txBody>
+      </p:sp>
+    </p:spTree>
+  </p:cSld>
+  <p:clrMapOvr>
+    <a:masterClrMapping/>
+  </p:clrMapOvr>
+</p:sld>
+</file>
+
+<file path=ppt/slides/slide126.xml><?xml version="1.0" encoding="utf-8"?>
+<p:sld xmlns:a="http://schemas.openxmlformats.org/drawingml/2006/main" xmlns:p="http://schemas.openxmlformats.org/presentationml/2006/main" xmlns:r="http://schemas.openxmlformats.org/officeDocument/2006/relationships">
+  <p:cSld>
+    <p:bg>
+      <p:bgPr>
+        <a:solidFill>
+          <a:srgbClr val="00FF00"/>
+        </a:solidFill>
+        <a:effectLst/>
+      </p:bgPr>
+    </p:bg>
+    <p:spTree>
+      <p:nvGrpSpPr>
+        <p:cNvPr id="1" name=""/>
+        <p:cNvGrpSpPr/>
+        <p:nvPr/>
+      </p:nvGrpSpPr>
+      <p:grpSpPr/>
+      <p:sp>
+        <p:nvSpPr>
+          <p:cNvPr id="2" name="TextBox 1"/>
+          <p:cNvSpPr txBox="1"/>
+          <p:nvPr/>
+        </p:nvSpPr>
+        <p:spPr>
+          <a:xfrm>
+            <a:off x="624059" y="5400000"/>
+            <a:ext cx="10944000" cy="1188000"/>
+          </a:xfrm>
+          <a:prstGeom prst="rect">
+            <a:avLst/>
+          </a:prstGeom>
+          <a:solidFill>
+            <a:srgbClr val="203864"/>
+          </a:solidFill>
+        </p:spPr>
+        <p:txBody>
+          <a:bodyPr wrap="none" anchor="ctr">
+            <a:normAutofit/>
+          </a:bodyPr>
+          <a:lstStyle/>
+          <a:p>
+            <a:pPr algn="ctr">
+              <a:defRPr sz="3500">
+                <a:solidFill>
+                  <a:srgbClr val="FFFFFF"/>
+                </a:solidFill>
+                <a:latin typeface="Pretendard Semibold"/>
+              </a:defRPr>
+            </a:pPr>
+            <a:r>
+              <a:t>할 수 있다 하신 이는 나의 능력 주 하나님</a:t>
+            </a:r>
+          </a:p>
+        </p:txBody>
+      </p:sp>
+    </p:spTree>
+  </p:cSld>
+  <p:clrMapOvr>
+    <a:masterClrMapping/>
+  </p:clrMapOvr>
+</p:sld>
+</file>
+
+<file path=ppt/slides/slide127.xml><?xml version="1.0" encoding="utf-8"?>
+<p:sld xmlns:a="http://schemas.openxmlformats.org/drawingml/2006/main" xmlns:p="http://schemas.openxmlformats.org/presentationml/2006/main" xmlns:r="http://schemas.openxmlformats.org/officeDocument/2006/relationships">
+  <p:cSld>
+    <p:bg>
+      <p:bgPr>
+        <a:solidFill>
+          <a:srgbClr val="00FF00"/>
+        </a:solidFill>
+        <a:effectLst/>
+      </p:bgPr>
+    </p:bg>
+    <p:spTree>
+      <p:nvGrpSpPr>
+        <p:cNvPr id="1" name=""/>
+        <p:cNvGrpSpPr/>
+        <p:nvPr/>
+      </p:nvGrpSpPr>
+      <p:grpSpPr/>
+      <p:sp>
+        <p:nvSpPr>
+          <p:cNvPr id="2" name="TextBox 1"/>
+          <p:cNvSpPr txBox="1"/>
+          <p:nvPr/>
+        </p:nvSpPr>
+        <p:spPr>
+          <a:xfrm>
+            <a:off x="624059" y="5400000"/>
+            <a:ext cx="10944000" cy="1188000"/>
+          </a:xfrm>
+          <a:prstGeom prst="rect">
+            <a:avLst/>
+          </a:prstGeom>
+          <a:solidFill>
+            <a:srgbClr val="203864"/>
+          </a:solidFill>
+        </p:spPr>
+        <p:txBody>
+          <a:bodyPr wrap="none" anchor="ctr">
+            <a:normAutofit/>
+          </a:bodyPr>
+          <a:lstStyle/>
+          <a:p>
+            <a:pPr algn="ctr">
+              <a:defRPr sz="3500">
+                <a:solidFill>
+                  <a:srgbClr val="FFFFFF"/>
+                </a:solidFill>
+                <a:latin typeface="Pretendard Semibold"/>
+              </a:defRPr>
+            </a:pPr>
+            <a:r>
+              <a:t>주저 말라 하시고 십자가를 지라 하시네</a:t>
+            </a:r>
+          </a:p>
+        </p:txBody>
+      </p:sp>
+    </p:spTree>
+  </p:cSld>
+  <p:clrMapOvr>
+    <a:masterClrMapping/>
+  </p:clrMapOvr>
+</p:sld>
+</file>
+
+<file path=ppt/slides/slide128.xml><?xml version="1.0" encoding="utf-8"?>
+<p:sld xmlns:a="http://schemas.openxmlformats.org/drawingml/2006/main" xmlns:p="http://schemas.openxmlformats.org/presentationml/2006/main" xmlns:r="http://schemas.openxmlformats.org/officeDocument/2006/relationships">
+  <p:cSld>
+    <p:bg>
+      <p:bgPr>
+        <a:solidFill>
+          <a:srgbClr val="00FF00"/>
+        </a:solidFill>
+        <a:effectLst/>
+      </p:bgPr>
+    </p:bg>
+    <p:spTree>
+      <p:nvGrpSpPr>
+        <p:cNvPr id="1" name=""/>
+        <p:cNvGrpSpPr/>
+        <p:nvPr/>
+      </p:nvGrpSpPr>
+      <p:grpSpPr/>
+      <p:sp>
+        <p:nvSpPr>
+          <p:cNvPr id="2" name="TextBox 1"/>
+          <p:cNvSpPr txBox="1"/>
+          <p:nvPr/>
+        </p:nvSpPr>
+        <p:spPr>
+          <a:xfrm>
+            <a:off x="624059" y="5400000"/>
+            <a:ext cx="10944000" cy="1188000"/>
+          </a:xfrm>
+          <a:prstGeom prst="rect">
+            <a:avLst/>
+          </a:prstGeom>
+          <a:solidFill>
+            <a:srgbClr val="203864"/>
+          </a:solidFill>
+        </p:spPr>
+        <p:txBody>
+          <a:bodyPr wrap="none" anchor="ctr">
+            <a:normAutofit/>
+          </a:bodyPr>
+          <a:lstStyle/>
+          <a:p>
+            <a:pPr algn="ctr">
+              <a:defRPr sz="3500">
+                <a:solidFill>
+                  <a:srgbClr val="FFFFFF"/>
+                </a:solidFill>
+                <a:latin typeface="Pretendard Semibold"/>
+              </a:defRPr>
+            </a:pPr>
+            <a:r>
+              <a:t>할 수 있다 하신 주 할 수 있다 하신 주</a:t>
+            </a:r>
+          </a:p>
+        </p:txBody>
+      </p:sp>
+    </p:spTree>
+  </p:cSld>
+  <p:clrMapOvr>
+    <a:masterClrMapping/>
+  </p:clrMapOvr>
+</p:sld>
+</file>
+
+<file path=ppt/slides/slide129.xml><?xml version="1.0" encoding="utf-8"?>
+<p:sld xmlns:a="http://schemas.openxmlformats.org/drawingml/2006/main" xmlns:p="http://schemas.openxmlformats.org/presentationml/2006/main" xmlns:r="http://schemas.openxmlformats.org/officeDocument/2006/relationships">
+  <p:cSld>
+    <p:bg>
+      <p:bgPr>
+        <a:solidFill>
+          <a:srgbClr val="00FF00"/>
+        </a:solidFill>
+        <a:effectLst/>
+      </p:bgPr>
+    </p:bg>
+    <p:spTree>
+      <p:nvGrpSpPr>
+        <p:cNvPr id="1" name=""/>
+        <p:cNvGrpSpPr/>
+        <p:nvPr/>
+      </p:nvGrpSpPr>
+      <p:grpSpPr/>
+      <p:sp>
+        <p:nvSpPr>
+          <p:cNvPr id="2" name="TextBox 1"/>
+          <p:cNvSpPr txBox="1"/>
+          <p:nvPr/>
+        </p:nvSpPr>
+        <p:spPr>
+          <a:xfrm>
+            <a:off x="624059" y="5400000"/>
+            <a:ext cx="10944000" cy="1188000"/>
+          </a:xfrm>
+          <a:prstGeom prst="rect">
+            <a:avLst/>
+          </a:prstGeom>
+          <a:solidFill>
+            <a:srgbClr val="203864"/>
+          </a:solidFill>
+        </p:spPr>
+        <p:txBody>
+          <a:bodyPr wrap="none" anchor="ctr">
+            <a:normAutofit/>
+          </a:bodyPr>
+          <a:lstStyle/>
+          <a:p>
+            <a:pPr algn="ctr">
+              <a:defRPr sz="3500">
+                <a:solidFill>
+                  <a:srgbClr val="FFFFFF"/>
+                </a:solidFill>
+                <a:latin typeface="Pretendard Semibold"/>
+              </a:defRPr>
+            </a:pPr>
+            <a:r>
+              <a:t>희생 만이 희생 만이 능력이라 하시네</a:t>
+            </a:r>
+          </a:p>
+        </p:txBody>
+      </p:sp>
+    </p:spTree>
+  </p:cSld>
+  <p:clrMapOvr>
+    <a:masterClrMapping/>
+  </p:clrMapOvr>
+</p:sld>
+</file>
+
+<file path=ppt/slides/slide13.xml><?xml version="1.0" encoding="utf-8"?>
+<p:sld xmlns:a="http://schemas.openxmlformats.org/drawingml/2006/main" xmlns:p="http://schemas.openxmlformats.org/presentationml/2006/main" xmlns:r="http://schemas.openxmlformats.org/officeDocument/2006/relationships">
+  <p:cSld>
+    <p:bg>
+      <p:bgPr>
+        <a:solidFill>
+          <a:srgbClr val="00FF00"/>
+        </a:solidFill>
+        <a:effectLst/>
+      </p:bgPr>
+    </p:bg>
+    <p:spTree>
+      <p:nvGrpSpPr>
+        <p:cNvPr id="1" name=""/>
+        <p:cNvGrpSpPr/>
+        <p:nvPr/>
+      </p:nvGrpSpPr>
+      <p:grpSpPr/>
+      <p:sp>
+        <p:nvSpPr>
+          <p:cNvPr id="2" name="TextBox 1"/>
+          <p:cNvSpPr txBox="1"/>
+          <p:nvPr/>
+        </p:nvSpPr>
+        <p:spPr>
+          <a:xfrm>
+            <a:off x="624059" y="5400000"/>
+            <a:ext cx="10944000" cy="1188000"/>
+          </a:xfrm>
+          <a:prstGeom prst="rect">
+            <a:avLst/>
+          </a:prstGeom>
+          <a:solidFill>
+            <a:srgbClr val="203864"/>
+          </a:solidFill>
+        </p:spPr>
+        <p:txBody>
+          <a:bodyPr wrap="none" anchor="ctr">
+            <a:normAutofit/>
+          </a:bodyPr>
+          <a:lstStyle/>
+          <a:p>
+            <a:pPr algn="ctr">
+              <a:defRPr sz="3500">
+                <a:solidFill>
+                  <a:srgbClr val="FFFFFF"/>
+                </a:solidFill>
+                <a:latin typeface="Pretendard Semibold"/>
+              </a:defRPr>
+            </a:pPr>
+            <a:r>
+              <a:t>사망의 그늘이 너와 내 앞에 둘리며 가리우네</a:t>
+            </a:r>
+          </a:p>
+        </p:txBody>
+      </p:sp>
+    </p:spTree>
+  </p:cSld>
+  <p:clrMapOvr>
+    <a:masterClrMapping/>
+  </p:clrMapOvr>
+</p:sld>
+</file>
+
+<file path=ppt/slides/slide130.xml><?xml version="1.0" encoding="utf-8"?>
+<p:sld xmlns:a="http://schemas.openxmlformats.org/drawingml/2006/main" xmlns:p="http://schemas.openxmlformats.org/presentationml/2006/main" xmlns:r="http://schemas.openxmlformats.org/officeDocument/2006/relationships">
+  <p:cSld>
+    <p:bg>
+      <p:bgPr>
+        <a:solidFill>
+          <a:srgbClr val="00FF00"/>
+        </a:solidFill>
+        <a:effectLst/>
+      </p:bgPr>
+    </p:bg>
+    <p:spTree>
+      <p:nvGrpSpPr>
+        <p:cNvPr id="1" name=""/>
+        <p:cNvGrpSpPr/>
+        <p:nvPr/>
+      </p:nvGrpSpPr>
+      <p:grpSpPr/>
+      <p:sp>
+        <p:nvSpPr>
+          <p:cNvPr id="2" name="TextBox 1"/>
+          <p:cNvSpPr txBox="1"/>
+          <p:nvPr/>
+        </p:nvSpPr>
+        <p:spPr>
+          <a:xfrm>
+            <a:off x="624059" y="5400000"/>
+            <a:ext cx="10944000" cy="1188000"/>
+          </a:xfrm>
+          <a:prstGeom prst="rect">
+            <a:avLst/>
+          </a:prstGeom>
+          <a:solidFill>
+            <a:srgbClr val="203864"/>
+          </a:solidFill>
+        </p:spPr>
+        <p:txBody>
+          <a:bodyPr wrap="none" anchor="ctr">
+            <a:normAutofit/>
+          </a:bodyPr>
+          <a:lstStyle/>
+          <a:p>
+            <a:pPr algn="ctr">
+              <a:defRPr sz="3500">
+                <a:solidFill>
+                  <a:srgbClr val="FFFFFF"/>
+                </a:solidFill>
+                <a:latin typeface="Pretendard Semibold"/>
+              </a:defRPr>
+            </a:pPr>
+            <a:r>
+              <a:t>희생 만이 희생 만이 능력이라 하시네</a:t>
+            </a:r>
+          </a:p>
+        </p:txBody>
+      </p:sp>
+    </p:spTree>
+  </p:cSld>
+  <p:clrMapOvr>
+    <a:masterClrMapping/>
+  </p:clrMapOvr>
+</p:sld>
+</file>
+
+<file path=ppt/slides/slide131.xml><?xml version="1.0" encoding="utf-8"?>
+<p:sld xmlns:a="http://schemas.openxmlformats.org/drawingml/2006/main" xmlns:p="http://schemas.openxmlformats.org/presentationml/2006/main" xmlns:r="http://schemas.openxmlformats.org/officeDocument/2006/relationships">
+  <p:cSld>
+    <p:bg>
+      <p:bgPr>
+        <a:solidFill>
+          <a:srgbClr val="00FF00"/>
+        </a:solidFill>
+        <a:effectLst/>
+      </p:bgPr>
+    </p:bg>
+    <p:spTree>
+      <p:nvGrpSpPr>
+        <p:cNvPr id="1" name=""/>
+        <p:cNvGrpSpPr/>
+        <p:nvPr/>
+      </p:nvGrpSpPr>
+      <p:grpSpPr/>
+      <p:sp>
+        <p:nvSpPr>
+          <p:cNvPr id="2" name="TextBox 1"/>
+          <p:cNvSpPr txBox="1"/>
+          <p:nvPr/>
+        </p:nvSpPr>
+        <p:spPr>
+          <a:xfrm>
+            <a:off x="624059" y="5400000"/>
+            <a:ext cx="10944000" cy="1188000"/>
+          </a:xfrm>
+          <a:prstGeom prst="rect">
+            <a:avLst/>
+          </a:prstGeom>
+          <a:solidFill>
+            <a:srgbClr val="203864"/>
+          </a:solidFill>
+        </p:spPr>
+        <p:txBody>
+          <a:bodyPr wrap="none" anchor="ctr">
+            <a:normAutofit/>
+          </a:bodyPr>
+          <a:lstStyle/>
+          <a:p>
+            <a:pPr algn="ctr">
+              <a:defRPr sz="3500">
+                <a:solidFill>
+                  <a:srgbClr val="FFFFFF"/>
+                </a:solidFill>
+                <a:latin typeface="Pretendard Semibold"/>
+              </a:defRPr>
+            </a:pPr>
+            <a:r>
+              <a:t>할 수 있다 하신 이는 나의 능력 주 하나님</a:t>
+            </a:r>
+          </a:p>
+        </p:txBody>
+      </p:sp>
+    </p:spTree>
+  </p:cSld>
+  <p:clrMapOvr>
+    <a:masterClrMapping/>
+  </p:clrMapOvr>
+</p:sld>
+</file>
+
+<file path=ppt/slides/slide132.xml><?xml version="1.0" encoding="utf-8"?>
+<p:sld xmlns:a="http://schemas.openxmlformats.org/drawingml/2006/main" xmlns:p="http://schemas.openxmlformats.org/presentationml/2006/main" xmlns:r="http://schemas.openxmlformats.org/officeDocument/2006/relationships">
+  <p:cSld>
+    <p:bg>
+      <p:bgPr>
+        <a:solidFill>
+          <a:srgbClr val="00FF00"/>
+        </a:solidFill>
+        <a:effectLst/>
+      </p:bgPr>
+    </p:bg>
+    <p:spTree>
+      <p:nvGrpSpPr>
+        <p:cNvPr id="1" name=""/>
+        <p:cNvGrpSpPr/>
+        <p:nvPr/>
+      </p:nvGrpSpPr>
+      <p:grpSpPr/>
+      <p:sp>
+        <p:nvSpPr>
+          <p:cNvPr id="2" name="TextBox 1"/>
+          <p:cNvSpPr txBox="1"/>
+          <p:nvPr/>
+        </p:nvSpPr>
+        <p:spPr>
+          <a:xfrm>
+            <a:off x="624059" y="5400000"/>
+            <a:ext cx="10944000" cy="1188000"/>
+          </a:xfrm>
+          <a:prstGeom prst="rect">
+            <a:avLst/>
+          </a:prstGeom>
+          <a:solidFill>
+            <a:srgbClr val="203864"/>
+          </a:solidFill>
+        </p:spPr>
+        <p:txBody>
+          <a:bodyPr wrap="none" anchor="ctr">
+            <a:normAutofit/>
+          </a:bodyPr>
+          <a:lstStyle/>
+          <a:p>
+            <a:pPr algn="ctr">
+              <a:defRPr sz="3500">
+                <a:solidFill>
+                  <a:srgbClr val="FFFFFF"/>
+                </a:solidFill>
+                <a:latin typeface="Pretendard Semibold"/>
+              </a:defRPr>
+            </a:pPr>
+            <a:r>
+              <a:t>낙심 말라 하시고 기도하라 하시네</a:t>
+            </a:r>
+          </a:p>
+        </p:txBody>
+      </p:sp>
+    </p:spTree>
+  </p:cSld>
+  <p:clrMapOvr>
+    <a:masterClrMapping/>
+  </p:clrMapOvr>
+</p:sld>
+</file>
+
+<file path=ppt/slides/slide133.xml><?xml version="1.0" encoding="utf-8"?>
+<p:sld xmlns:a="http://schemas.openxmlformats.org/drawingml/2006/main" xmlns:p="http://schemas.openxmlformats.org/presentationml/2006/main" xmlns:r="http://schemas.openxmlformats.org/officeDocument/2006/relationships">
+  <p:cSld>
+    <p:bg>
+      <p:bgPr>
+        <a:solidFill>
+          <a:srgbClr val="00FF00"/>
+        </a:solidFill>
+        <a:effectLst/>
+      </p:bgPr>
+    </p:bg>
+    <p:spTree>
+      <p:nvGrpSpPr>
+        <p:cNvPr id="1" name=""/>
+        <p:cNvGrpSpPr/>
+        <p:nvPr/>
+      </p:nvGrpSpPr>
+      <p:grpSpPr/>
+      <p:sp>
+        <p:nvSpPr>
+          <p:cNvPr id="2" name="TextBox 1"/>
+          <p:cNvSpPr txBox="1"/>
+          <p:nvPr/>
+        </p:nvSpPr>
+        <p:spPr>
+          <a:xfrm>
+            <a:off x="624059" y="5400000"/>
+            <a:ext cx="10944000" cy="1188000"/>
+          </a:xfrm>
+          <a:prstGeom prst="rect">
+            <a:avLst/>
+          </a:prstGeom>
+          <a:solidFill>
+            <a:srgbClr val="203864"/>
+          </a:solidFill>
+        </p:spPr>
+        <p:txBody>
+          <a:bodyPr wrap="none" anchor="ctr">
+            <a:normAutofit/>
+          </a:bodyPr>
+          <a:lstStyle/>
+          <a:p>
+            <a:pPr algn="ctr">
+              <a:defRPr sz="3500">
+                <a:solidFill>
+                  <a:srgbClr val="FFFFFF"/>
+                </a:solidFill>
+                <a:latin typeface="Pretendard Semibold"/>
+              </a:defRPr>
+            </a:pPr>
+            <a:r>
+              <a:t>할 수 있다 하신 주 할 수 있다 하신 주</a:t>
+            </a:r>
+          </a:p>
+        </p:txBody>
+      </p:sp>
+    </p:spTree>
+  </p:cSld>
+  <p:clrMapOvr>
+    <a:masterClrMapping/>
+  </p:clrMapOvr>
+</p:sld>
+</file>
+
+<file path=ppt/slides/slide134.xml><?xml version="1.0" encoding="utf-8"?>
+<p:sld xmlns:a="http://schemas.openxmlformats.org/drawingml/2006/main" xmlns:p="http://schemas.openxmlformats.org/presentationml/2006/main" xmlns:r="http://schemas.openxmlformats.org/officeDocument/2006/relationships">
+  <p:cSld>
+    <p:bg>
+      <p:bgPr>
+        <a:solidFill>
+          <a:srgbClr val="00FF00"/>
+        </a:solidFill>
+        <a:effectLst/>
+      </p:bgPr>
+    </p:bg>
+    <p:spTree>
+      <p:nvGrpSpPr>
+        <p:cNvPr id="1" name=""/>
+        <p:cNvGrpSpPr/>
+        <p:nvPr/>
+      </p:nvGrpSpPr>
+      <p:grpSpPr/>
+      <p:sp>
+        <p:nvSpPr>
+          <p:cNvPr id="2" name="TextBox 1"/>
+          <p:cNvSpPr txBox="1"/>
+          <p:nvPr/>
+        </p:nvSpPr>
+        <p:spPr>
+          <a:xfrm>
+            <a:off x="624059" y="5400000"/>
+            <a:ext cx="10944000" cy="1188000"/>
+          </a:xfrm>
+          <a:prstGeom prst="rect">
+            <a:avLst/>
+          </a:prstGeom>
+          <a:solidFill>
+            <a:srgbClr val="203864"/>
+          </a:solidFill>
+        </p:spPr>
+        <p:txBody>
+          <a:bodyPr wrap="none" anchor="ctr">
+            <a:normAutofit/>
+          </a:bodyPr>
+          <a:lstStyle/>
+          <a:p>
+            <a:pPr algn="ctr">
+              <a:defRPr sz="3500">
+                <a:solidFill>
+                  <a:srgbClr val="FFFFFF"/>
+                </a:solidFill>
+                <a:latin typeface="Pretendard Semibold"/>
+              </a:defRPr>
+            </a:pPr>
+            <a:r>
+              <a:t>기도 만이 기도 만이 능력이라 하시네</a:t>
+            </a:r>
+          </a:p>
+        </p:txBody>
+      </p:sp>
+    </p:spTree>
+  </p:cSld>
+  <p:clrMapOvr>
+    <a:masterClrMapping/>
+  </p:clrMapOvr>
+</p:sld>
+</file>
+
+<file path=ppt/slides/slide135.xml><?xml version="1.0" encoding="utf-8"?>
+<p:sld xmlns:a="http://schemas.openxmlformats.org/drawingml/2006/main" xmlns:p="http://schemas.openxmlformats.org/presentationml/2006/main" xmlns:r="http://schemas.openxmlformats.org/officeDocument/2006/relationships">
+  <p:cSld>
+    <p:bg>
+      <p:bgPr>
+        <a:solidFill>
+          <a:srgbClr val="00FF00"/>
+        </a:solidFill>
+        <a:effectLst/>
+      </p:bgPr>
+    </p:bg>
+    <p:spTree>
+      <p:nvGrpSpPr>
+        <p:cNvPr id="1" name=""/>
+        <p:cNvGrpSpPr/>
+        <p:nvPr/>
+      </p:nvGrpSpPr>
+      <p:grpSpPr/>
+      <p:sp>
+        <p:nvSpPr>
+          <p:cNvPr id="2" name="TextBox 1"/>
+          <p:cNvSpPr txBox="1"/>
+          <p:nvPr/>
+        </p:nvSpPr>
+        <p:spPr>
+          <a:xfrm>
+            <a:off x="624059" y="5400000"/>
+            <a:ext cx="10944000" cy="1188000"/>
+          </a:xfrm>
+          <a:prstGeom prst="rect">
+            <a:avLst/>
+          </a:prstGeom>
+          <a:solidFill>
+            <a:srgbClr val="203864"/>
+          </a:solidFill>
+        </p:spPr>
+        <p:txBody>
+          <a:bodyPr wrap="none" anchor="ctr">
+            <a:normAutofit/>
+          </a:bodyPr>
+          <a:lstStyle/>
+          <a:p>
+            <a:pPr algn="ctr">
+              <a:defRPr sz="3500">
+                <a:solidFill>
+                  <a:srgbClr val="FFFFFF"/>
+                </a:solidFill>
+                <a:latin typeface="Pretendard Semibold"/>
+              </a:defRPr>
+            </a:pPr>
+            <a:r>
+              <a:t>기도 만이 기도 만이 능력이라 하시네</a:t>
+            </a:r>
+          </a:p>
+        </p:txBody>
+      </p:sp>
+    </p:spTree>
+  </p:cSld>
+  <p:clrMapOvr>
+    <a:masterClrMapping/>
+  </p:clrMapOvr>
+</p:sld>
+</file>
+
+<file path=ppt/slides/slide136.xml><?xml version="1.0" encoding="utf-8"?>
+<p:sld xmlns:a="http://schemas.openxmlformats.org/drawingml/2006/main" xmlns:p="http://schemas.openxmlformats.org/presentationml/2006/main" xmlns:r="http://schemas.openxmlformats.org/officeDocument/2006/relationships">
+  <p:cSld>
+    <p:bg>
+      <p:bgPr>
+        <a:solidFill>
+          <a:srgbClr val="00FF00"/>
+        </a:solidFill>
+        <a:effectLst/>
+      </p:bgPr>
+    </p:bg>
+    <p:spTree>
+      <p:nvGrpSpPr>
+        <p:cNvPr id="1" name=""/>
+        <p:cNvGrpSpPr/>
+        <p:nvPr/>
+      </p:nvGrpSpPr>
+      <p:grpSpPr/>
+    </p:spTree>
+  </p:cSld>
+  <p:clrMapOvr>
+    <a:masterClrMapping/>
+  </p:clrMapOvr>
+</p:sld>
+</file>
+
+<file path=ppt/slides/slide137.xml><?xml version="1.0" encoding="utf-8"?>
 <p:sld xmlns:a="http://schemas.openxmlformats.org/drawingml/2006/main" xmlns:p="http://schemas.openxmlformats.org/presentationml/2006/main" xmlns:r="http://schemas.openxmlformats.org/officeDocument/2006/relationships">
   <p:cSld>
     <p:bg>
@@ -5133,33 +6042,33 @@
 </p:sld>
 </file>
 
-<file path=ppt/slides/slide125.xml><?xml version="1.0" encoding="utf-8"?>
-<p:sld xmlns:a="http://schemas.openxmlformats.org/drawingml/2006/main" xmlns:p="http://schemas.openxmlformats.org/presentationml/2006/main" xmlns:r="http://schemas.openxmlformats.org/officeDocument/2006/relationships">
-  <p:cSld>
-    <p:bg>
-      <p:bgPr>
-        <a:solidFill>
-          <a:srgbClr val="00FF00"/>
-        </a:solidFill>
-        <a:effectLst/>
-      </p:bgPr>
-    </p:bg>
-    <p:spTree>
-      <p:nvGrpSpPr>
-        <p:cNvPr id="1" name=""/>
-        <p:cNvGrpSpPr/>
-        <p:nvPr/>
-      </p:nvGrpSpPr>
-      <p:grpSpPr/>
-    </p:spTree>
-  </p:cSld>
-  <p:clrMapOvr>
-    <a:masterClrMapping/>
-  </p:clrMapOvr>
-</p:sld>
-</file>
-
-<file path=ppt/slides/slide126.xml><?xml version="1.0" encoding="utf-8"?>
+<file path=ppt/slides/slide138.xml><?xml version="1.0" encoding="utf-8"?>
+<p:sld xmlns:a="http://schemas.openxmlformats.org/drawingml/2006/main" xmlns:p="http://schemas.openxmlformats.org/presentationml/2006/main" xmlns:r="http://schemas.openxmlformats.org/officeDocument/2006/relationships">
+  <p:cSld>
+    <p:bg>
+      <p:bgPr>
+        <a:solidFill>
+          <a:srgbClr val="00FF00"/>
+        </a:solidFill>
+        <a:effectLst/>
+      </p:bgPr>
+    </p:bg>
+    <p:spTree>
+      <p:nvGrpSpPr>
+        <p:cNvPr id="1" name=""/>
+        <p:cNvGrpSpPr/>
+        <p:nvPr/>
+      </p:nvGrpSpPr>
+      <p:grpSpPr/>
+    </p:spTree>
+  </p:cSld>
+  <p:clrMapOvr>
+    <a:masterClrMapping/>
+  </p:clrMapOvr>
+</p:sld>
+</file>
+
+<file path=ppt/slides/slide139.xml><?xml version="1.0" encoding="utf-8"?>
 <p:sld xmlns:a="http://schemas.openxmlformats.org/drawingml/2006/main" xmlns:p="http://schemas.openxmlformats.org/presentationml/2006/main" xmlns:r="http://schemas.openxmlformats.org/officeDocument/2006/relationships">
   <p:cSld>
     <p:bg>
@@ -5232,33 +6141,7 @@
 </p:sld>
 </file>
 
-<file path=ppt/slides/slide127.xml><?xml version="1.0" encoding="utf-8"?>
-<p:sld xmlns:a="http://schemas.openxmlformats.org/drawingml/2006/main" xmlns:p="http://schemas.openxmlformats.org/presentationml/2006/main" xmlns:r="http://schemas.openxmlformats.org/officeDocument/2006/relationships">
-  <p:cSld>
-    <p:bg>
-      <p:bgPr>
-        <a:solidFill>
-          <a:srgbClr val="00FF00"/>
-        </a:solidFill>
-        <a:effectLst/>
-      </p:bgPr>
-    </p:bg>
-    <p:spTree>
-      <p:nvGrpSpPr>
-        <p:cNvPr id="1" name=""/>
-        <p:cNvGrpSpPr/>
-        <p:nvPr/>
-      </p:nvGrpSpPr>
-      <p:grpSpPr/>
-    </p:spTree>
-  </p:cSld>
-  <p:clrMapOvr>
-    <a:masterClrMapping/>
-  </p:clrMapOvr>
-</p:sld>
-</file>
-
-<file path=ppt/slides/slide128.xml><?xml version="1.0" encoding="utf-8"?>
+<file path=ppt/slides/slide14.xml><?xml version="1.0" encoding="utf-8"?>
 <p:sld xmlns:a="http://schemas.openxmlformats.org/drawingml/2006/main" xmlns:p="http://schemas.openxmlformats.org/presentationml/2006/main" xmlns:r="http://schemas.openxmlformats.org/officeDocument/2006/relationships">
   <p:cSld>
     <p:bg>
@@ -5309,6 +6192,96 @@
               </a:defRPr>
             </a:pPr>
             <a:r>
+              <a:t>오라 오라 방황치 말고 오라</a:t>
+            </a:r>
+          </a:p>
+        </p:txBody>
+      </p:sp>
+    </p:spTree>
+  </p:cSld>
+  <p:clrMapOvr>
+    <a:masterClrMapping/>
+  </p:clrMapOvr>
+</p:sld>
+</file>
+
+<file path=ppt/slides/slide140.xml><?xml version="1.0" encoding="utf-8"?>
+<p:sld xmlns:a="http://schemas.openxmlformats.org/drawingml/2006/main" xmlns:p="http://schemas.openxmlformats.org/presentationml/2006/main" xmlns:r="http://schemas.openxmlformats.org/officeDocument/2006/relationships">
+  <p:cSld>
+    <p:bg>
+      <p:bgPr>
+        <a:solidFill>
+          <a:srgbClr val="00FF00"/>
+        </a:solidFill>
+        <a:effectLst/>
+      </p:bgPr>
+    </p:bg>
+    <p:spTree>
+      <p:nvGrpSpPr>
+        <p:cNvPr id="1" name=""/>
+        <p:cNvGrpSpPr/>
+        <p:nvPr/>
+      </p:nvGrpSpPr>
+      <p:grpSpPr/>
+    </p:spTree>
+  </p:cSld>
+  <p:clrMapOvr>
+    <a:masterClrMapping/>
+  </p:clrMapOvr>
+</p:sld>
+</file>
+
+<file path=ppt/slides/slide141.xml><?xml version="1.0" encoding="utf-8"?>
+<p:sld xmlns:a="http://schemas.openxmlformats.org/drawingml/2006/main" xmlns:p="http://schemas.openxmlformats.org/presentationml/2006/main" xmlns:r="http://schemas.openxmlformats.org/officeDocument/2006/relationships">
+  <p:cSld>
+    <p:bg>
+      <p:bgPr>
+        <a:solidFill>
+          <a:srgbClr val="00FF00"/>
+        </a:solidFill>
+        <a:effectLst/>
+      </p:bgPr>
+    </p:bg>
+    <p:spTree>
+      <p:nvGrpSpPr>
+        <p:cNvPr id="1" name=""/>
+        <p:cNvGrpSpPr/>
+        <p:nvPr/>
+      </p:nvGrpSpPr>
+      <p:grpSpPr/>
+      <p:sp>
+        <p:nvSpPr>
+          <p:cNvPr id="2" name="TextBox 1"/>
+          <p:cNvSpPr txBox="1"/>
+          <p:nvPr/>
+        </p:nvSpPr>
+        <p:spPr>
+          <a:xfrm>
+            <a:off x="624059" y="5400000"/>
+            <a:ext cx="10944000" cy="1188000"/>
+          </a:xfrm>
+          <a:prstGeom prst="rect">
+            <a:avLst/>
+          </a:prstGeom>
+          <a:solidFill>
+            <a:srgbClr val="203864"/>
+          </a:solidFill>
+        </p:spPr>
+        <p:txBody>
+          <a:bodyPr wrap="none" anchor="ctr">
+            <a:normAutofit/>
+          </a:bodyPr>
+          <a:lstStyle/>
+          <a:p>
+            <a:pPr algn="ctr">
+              <a:defRPr sz="3500">
+                <a:solidFill>
+                  <a:srgbClr val="FFFFFF"/>
+                </a:solidFill>
+                <a:latin typeface="Pretendard Semibold"/>
+              </a:defRPr>
+            </a:pPr>
+            <a:r>
               <a:t>이 땅 위에 하나님의 교회 부르심을 따라일어나</a:t>
             </a:r>
           </a:p>
@@ -5360,7 +6333,7 @@
 </p:sld>
 </file>
 
-<file path=ppt/slides/slide129.xml><?xml version="1.0" encoding="utf-8"?>
+<file path=ppt/slides/slide142.xml><?xml version="1.0" encoding="utf-8"?>
 <p:sld xmlns:a="http://schemas.openxmlformats.org/drawingml/2006/main" xmlns:p="http://schemas.openxmlformats.org/presentationml/2006/main" xmlns:r="http://schemas.openxmlformats.org/officeDocument/2006/relationships">
   <p:cSld>
     <p:bg>
@@ -5424,7 +6397,7 @@
 </p:sld>
 </file>
 
-<file path=ppt/slides/slide13.xml><?xml version="1.0" encoding="utf-8"?>
+<file path=ppt/slides/slide143.xml><?xml version="1.0" encoding="utf-8"?>
 <p:sld xmlns:a="http://schemas.openxmlformats.org/drawingml/2006/main" xmlns:p="http://schemas.openxmlformats.org/presentationml/2006/main" xmlns:r="http://schemas.openxmlformats.org/officeDocument/2006/relationships">
   <p:cSld>
     <p:bg>
@@ -5475,20 +6448,20 @@
               </a:defRPr>
             </a:pPr>
             <a:r>
-              <a:t>사망의 그늘이 너와 내 앞에 둘리며 가리우네</a:t>
-            </a:r>
-          </a:p>
-        </p:txBody>
-      </p:sp>
-    </p:spTree>
-  </p:cSld>
-  <p:clrMapOvr>
-    <a:masterClrMapping/>
-  </p:clrMapOvr>
-</p:sld>
-</file>
-
-<file path=ppt/slides/slide130.xml><?xml version="1.0" encoding="utf-8"?>
+              <a:t>성령이여 이세대를 향해</a:t>
+            </a:r>
+          </a:p>
+        </p:txBody>
+      </p:sp>
+    </p:spTree>
+  </p:cSld>
+  <p:clrMapOvr>
+    <a:masterClrMapping/>
+  </p:clrMapOvr>
+</p:sld>
+</file>
+
+<file path=ppt/slides/slide144.xml><?xml version="1.0" encoding="utf-8"?>
 <p:sld xmlns:a="http://schemas.openxmlformats.org/drawingml/2006/main" xmlns:p="http://schemas.openxmlformats.org/presentationml/2006/main" xmlns:r="http://schemas.openxmlformats.org/officeDocument/2006/relationships">
   <p:cSld>
     <p:bg>
@@ -5539,20 +6512,20 @@
               </a:defRPr>
             </a:pPr>
             <a:r>
-              <a:t>성령이여 이세대를 향해</a:t>
-            </a:r>
-          </a:p>
-        </p:txBody>
-      </p:sp>
-    </p:spTree>
-  </p:cSld>
-  <p:clrMapOvr>
-    <a:masterClrMapping/>
-  </p:clrMapOvr>
-</p:sld>
-</file>
-
-<file path=ppt/slides/slide131.xml><?xml version="1.0" encoding="utf-8"?>
+              <a:t>주의 진리를 선포케 하소서</a:t>
+            </a:r>
+          </a:p>
+        </p:txBody>
+      </p:sp>
+    </p:spTree>
+  </p:cSld>
+  <p:clrMapOvr>
+    <a:masterClrMapping/>
+  </p:clrMapOvr>
+</p:sld>
+</file>
+
+<file path=ppt/slides/slide145.xml><?xml version="1.0" encoding="utf-8"?>
 <p:sld xmlns:a="http://schemas.openxmlformats.org/drawingml/2006/main" xmlns:p="http://schemas.openxmlformats.org/presentationml/2006/main" xmlns:r="http://schemas.openxmlformats.org/officeDocument/2006/relationships">
   <p:cSld>
     <p:bg>
@@ -5603,20 +6576,20 @@
               </a:defRPr>
             </a:pPr>
             <a:r>
-              <a:t>주의 진리를 선포케 하소서</a:t>
-            </a:r>
-          </a:p>
-        </p:txBody>
-      </p:sp>
-    </p:spTree>
-  </p:cSld>
-  <p:clrMapOvr>
-    <a:masterClrMapping/>
-  </p:clrMapOvr>
-</p:sld>
-</file>
-
-<file path=ppt/slides/slide132.xml><?xml version="1.0" encoding="utf-8"?>
+              <a:t>십자가에서 죽으신 그 사랑</a:t>
+            </a:r>
+          </a:p>
+        </p:txBody>
+      </p:sp>
+    </p:spTree>
+  </p:cSld>
+  <p:clrMapOvr>
+    <a:masterClrMapping/>
+  </p:clrMapOvr>
+</p:sld>
+</file>
+
+<file path=ppt/slides/slide146.xml><?xml version="1.0" encoding="utf-8"?>
 <p:sld xmlns:a="http://schemas.openxmlformats.org/drawingml/2006/main" xmlns:p="http://schemas.openxmlformats.org/presentationml/2006/main" xmlns:r="http://schemas.openxmlformats.org/officeDocument/2006/relationships">
   <p:cSld>
     <p:bg>
@@ -5667,20 +6640,20 @@
               </a:defRPr>
             </a:pPr>
             <a:r>
-              <a:t>십자가에서 죽으신 그 사랑</a:t>
-            </a:r>
-          </a:p>
-        </p:txBody>
-      </p:sp>
-    </p:spTree>
-  </p:cSld>
-  <p:clrMapOvr>
-    <a:masterClrMapping/>
-  </p:clrMapOvr>
-</p:sld>
-</file>
-
-<file path=ppt/slides/slide133.xml><?xml version="1.0" encoding="utf-8"?>
+              <a:t>우리 사랑 되게하소서</a:t>
+            </a:r>
+          </a:p>
+        </p:txBody>
+      </p:sp>
+    </p:spTree>
+  </p:cSld>
+  <p:clrMapOvr>
+    <a:masterClrMapping/>
+  </p:clrMapOvr>
+</p:sld>
+</file>
+
+<file path=ppt/slides/slide147.xml><?xml version="1.0" encoding="utf-8"?>
 <p:sld xmlns:a="http://schemas.openxmlformats.org/drawingml/2006/main" xmlns:p="http://schemas.openxmlformats.org/presentationml/2006/main" xmlns:r="http://schemas.openxmlformats.org/officeDocument/2006/relationships">
   <p:cSld>
     <p:bg>
@@ -5731,20 +6704,20 @@
               </a:defRPr>
             </a:pPr>
             <a:r>
-              <a:t>우리 사랑 되게하소서</a:t>
-            </a:r>
-          </a:p>
-        </p:txBody>
-      </p:sp>
-    </p:spTree>
-  </p:cSld>
-  <p:clrMapOvr>
-    <a:masterClrMapping/>
-  </p:clrMapOvr>
-</p:sld>
-</file>
-
-<file path=ppt/slides/slide134.xml><?xml version="1.0" encoding="utf-8"?>
+              <a:t>닫힌 문들아 열릴찌어다</a:t>
+            </a:r>
+          </a:p>
+        </p:txBody>
+      </p:sp>
+    </p:spTree>
+  </p:cSld>
+  <p:clrMapOvr>
+    <a:masterClrMapping/>
+  </p:clrMapOvr>
+</p:sld>
+</file>
+
+<file path=ppt/slides/slide148.xml><?xml version="1.0" encoding="utf-8"?>
 <p:sld xmlns:a="http://schemas.openxmlformats.org/drawingml/2006/main" xmlns:p="http://schemas.openxmlformats.org/presentationml/2006/main" xmlns:r="http://schemas.openxmlformats.org/officeDocument/2006/relationships">
   <p:cSld>
     <p:bg>
@@ -5795,20 +6768,20 @@
               </a:defRPr>
             </a:pPr>
             <a:r>
-              <a:t>닫힌 문들아 열릴찌어다</a:t>
-            </a:r>
-          </a:p>
-        </p:txBody>
-      </p:sp>
-    </p:spTree>
-  </p:cSld>
-  <p:clrMapOvr>
-    <a:masterClrMapping/>
-  </p:clrMapOvr>
-</p:sld>
-</file>
-
-<file path=ppt/slides/slide135.xml><?xml version="1.0" encoding="utf-8"?>
+              <a:t>모든세대여 일어나라</a:t>
+            </a:r>
+          </a:p>
+        </p:txBody>
+      </p:sp>
+    </p:spTree>
+  </p:cSld>
+  <p:clrMapOvr>
+    <a:masterClrMapping/>
+  </p:clrMapOvr>
+</p:sld>
+</file>
+
+<file path=ppt/slides/slide149.xml><?xml version="1.0" encoding="utf-8"?>
 <p:sld xmlns:a="http://schemas.openxmlformats.org/drawingml/2006/main" xmlns:p="http://schemas.openxmlformats.org/presentationml/2006/main" xmlns:r="http://schemas.openxmlformats.org/officeDocument/2006/relationships">
   <p:cSld>
     <p:bg>
@@ -5859,20 +6832,20 @@
               </a:defRPr>
             </a:pPr>
             <a:r>
-              <a:t>모든세대여 일어나라</a:t>
-            </a:r>
-          </a:p>
-        </p:txBody>
-      </p:sp>
-    </p:spTree>
-  </p:cSld>
-  <p:clrMapOvr>
-    <a:masterClrMapping/>
-  </p:clrMapOvr>
-</p:sld>
-</file>
-
-<file path=ppt/slides/slide136.xml><?xml version="1.0" encoding="utf-8"?>
+              <a:t>주 예수께 무릎끓고 경배드리세</a:t>
+            </a:r>
+          </a:p>
+        </p:txBody>
+      </p:sp>
+    </p:spTree>
+  </p:cSld>
+  <p:clrMapOvr>
+    <a:masterClrMapping/>
+  </p:clrMapOvr>
+</p:sld>
+</file>
+
+<file path=ppt/slides/slide15.xml><?xml version="1.0" encoding="utf-8"?>
 <p:sld xmlns:a="http://schemas.openxmlformats.org/drawingml/2006/main" xmlns:p="http://schemas.openxmlformats.org/presentationml/2006/main" xmlns:r="http://schemas.openxmlformats.org/officeDocument/2006/relationships">
   <p:cSld>
     <p:bg>
@@ -5923,20 +6896,20 @@
               </a:defRPr>
             </a:pPr>
             <a:r>
-              <a:t>주 예수께 무릎끓고 경배드리세</a:t>
-            </a:r>
-          </a:p>
-        </p:txBody>
-      </p:sp>
-    </p:spTree>
-  </p:cSld>
-  <p:clrMapOvr>
-    <a:masterClrMapping/>
-  </p:clrMapOvr>
-</p:sld>
-</file>
-
-<file path=ppt/slides/slide137.xml><?xml version="1.0" encoding="utf-8"?>
+              <a:t>죄 있는 자들아 이리로 오라 주 예수 앞에 오라</a:t>
+            </a:r>
+          </a:p>
+        </p:txBody>
+      </p:sp>
+    </p:spTree>
+  </p:cSld>
+  <p:clrMapOvr>
+    <a:masterClrMapping/>
+  </p:clrMapOvr>
+</p:sld>
+</file>
+
+<file path=ppt/slides/slide150.xml><?xml version="1.0" encoding="utf-8"?>
 <p:sld xmlns:a="http://schemas.openxmlformats.org/drawingml/2006/main" xmlns:p="http://schemas.openxmlformats.org/presentationml/2006/main" xmlns:r="http://schemas.openxmlformats.org/officeDocument/2006/relationships">
   <p:cSld>
     <p:bg>
@@ -6000,7 +6973,7 @@
 </p:sld>
 </file>
 
-<file path=ppt/slides/slide138.xml><?xml version="1.0" encoding="utf-8"?>
+<file path=ppt/slides/slide151.xml><?xml version="1.0" encoding="utf-8"?>
 <p:sld xmlns:a="http://schemas.openxmlformats.org/drawingml/2006/main" xmlns:p="http://schemas.openxmlformats.org/presentationml/2006/main" xmlns:r="http://schemas.openxmlformats.org/officeDocument/2006/relationships">
   <p:cSld>
     <p:bg>
@@ -6064,7 +7037,7 @@
 </p:sld>
 </file>
 
-<file path=ppt/slides/slide139.xml><?xml version="1.0" encoding="utf-8"?>
+<file path=ppt/slides/slide152.xml><?xml version="1.0" encoding="utf-8"?>
 <p:sld xmlns:a="http://schemas.openxmlformats.org/drawingml/2006/main" xmlns:p="http://schemas.openxmlformats.org/presentationml/2006/main" xmlns:r="http://schemas.openxmlformats.org/officeDocument/2006/relationships">
   <p:cSld>
     <p:bg>
@@ -6128,7 +7101,7 @@
 </p:sld>
 </file>
 
-<file path=ppt/slides/slide14.xml><?xml version="1.0" encoding="utf-8"?>
+<file path=ppt/slides/slide153.xml><?xml version="1.0" encoding="utf-8"?>
 <p:sld xmlns:a="http://schemas.openxmlformats.org/drawingml/2006/main" xmlns:p="http://schemas.openxmlformats.org/presentationml/2006/main" xmlns:r="http://schemas.openxmlformats.org/officeDocument/2006/relationships">
   <p:cSld>
     <p:bg>
@@ -6179,20 +7152,20 @@
               </a:defRPr>
             </a:pPr>
             <a:r>
-              <a:t>오라 오라 방황치 말고 오라</a:t>
-            </a:r>
-          </a:p>
-        </p:txBody>
-      </p:sp>
-    </p:spTree>
-  </p:cSld>
-  <p:clrMapOvr>
-    <a:masterClrMapping/>
-  </p:clrMapOvr>
-</p:sld>
-</file>
-
-<file path=ppt/slides/slide140.xml><?xml version="1.0" encoding="utf-8"?>
+              <a:t>일어나라 빛 발하라</a:t>
+            </a:r>
+          </a:p>
+        </p:txBody>
+      </p:sp>
+    </p:spTree>
+  </p:cSld>
+  <p:clrMapOvr>
+    <a:masterClrMapping/>
+  </p:clrMapOvr>
+</p:sld>
+</file>
+
+<file path=ppt/slides/slide154.xml><?xml version="1.0" encoding="utf-8"?>
 <p:sld xmlns:a="http://schemas.openxmlformats.org/drawingml/2006/main" xmlns:p="http://schemas.openxmlformats.org/presentationml/2006/main" xmlns:r="http://schemas.openxmlformats.org/officeDocument/2006/relationships">
   <p:cSld>
     <p:bg>
@@ -6243,20 +7216,20 @@
               </a:defRPr>
             </a:pPr>
             <a:r>
-              <a:t>일어나라 빛 발하라</a:t>
-            </a:r>
-          </a:p>
-        </p:txBody>
-      </p:sp>
-    </p:spTree>
-  </p:cSld>
-  <p:clrMapOvr>
-    <a:masterClrMapping/>
-  </p:clrMapOvr>
-</p:sld>
-</file>
-
-<file path=ppt/slides/slide141.xml><?xml version="1.0" encoding="utf-8"?>
+              <a:t>승리의 기 높이들고 전진하라</a:t>
+            </a:r>
+          </a:p>
+        </p:txBody>
+      </p:sp>
+    </p:spTree>
+  </p:cSld>
+  <p:clrMapOvr>
+    <a:masterClrMapping/>
+  </p:clrMapOvr>
+</p:sld>
+</file>
+
+<file path=ppt/slides/slide155.xml><?xml version="1.0" encoding="utf-8"?>
 <p:sld xmlns:a="http://schemas.openxmlformats.org/drawingml/2006/main" xmlns:p="http://schemas.openxmlformats.org/presentationml/2006/main" xmlns:r="http://schemas.openxmlformats.org/officeDocument/2006/relationships">
   <p:cSld>
     <p:bg>
@@ -6307,70 +7280,6 @@
               </a:defRPr>
             </a:pPr>
             <a:r>
-              <a:t>승리의 기 높이들고 전진하라</a:t>
-            </a:r>
-          </a:p>
-        </p:txBody>
-      </p:sp>
-    </p:spTree>
-  </p:cSld>
-  <p:clrMapOvr>
-    <a:masterClrMapping/>
-  </p:clrMapOvr>
-</p:sld>
-</file>
-
-<file path=ppt/slides/slide142.xml><?xml version="1.0" encoding="utf-8"?>
-<p:sld xmlns:a="http://schemas.openxmlformats.org/drawingml/2006/main" xmlns:p="http://schemas.openxmlformats.org/presentationml/2006/main" xmlns:r="http://schemas.openxmlformats.org/officeDocument/2006/relationships">
-  <p:cSld>
-    <p:bg>
-      <p:bgPr>
-        <a:solidFill>
-          <a:srgbClr val="00FF00"/>
-        </a:solidFill>
-        <a:effectLst/>
-      </p:bgPr>
-    </p:bg>
-    <p:spTree>
-      <p:nvGrpSpPr>
-        <p:cNvPr id="1" name=""/>
-        <p:cNvGrpSpPr/>
-        <p:nvPr/>
-      </p:nvGrpSpPr>
-      <p:grpSpPr/>
-      <p:sp>
-        <p:nvSpPr>
-          <p:cNvPr id="2" name="TextBox 1"/>
-          <p:cNvSpPr txBox="1"/>
-          <p:nvPr/>
-        </p:nvSpPr>
-        <p:spPr>
-          <a:xfrm>
-            <a:off x="624059" y="5400000"/>
-            <a:ext cx="10944000" cy="1188000"/>
-          </a:xfrm>
-          <a:prstGeom prst="rect">
-            <a:avLst/>
-          </a:prstGeom>
-          <a:solidFill>
-            <a:srgbClr val="203864"/>
-          </a:solidFill>
-        </p:spPr>
-        <p:txBody>
-          <a:bodyPr wrap="none" anchor="ctr">
-            <a:normAutofit/>
-          </a:bodyPr>
-          <a:lstStyle/>
-          <a:p>
-            <a:pPr algn="ctr">
-              <a:defRPr sz="3500">
-                <a:solidFill>
-                  <a:srgbClr val="FFFFFF"/>
-                </a:solidFill>
-                <a:latin typeface="Pretendard Semibold"/>
-              </a:defRPr>
-            </a:pPr>
-            <a:r>
               <a:t>주님 오실 길 예비하라</a:t>
             </a:r>
           </a:p>
@@ -6384,33 +7293,33 @@
 </p:sld>
 </file>
 
-<file path=ppt/slides/slide143.xml><?xml version="1.0" encoding="utf-8"?>
-<p:sld xmlns:a="http://schemas.openxmlformats.org/drawingml/2006/main" xmlns:p="http://schemas.openxmlformats.org/presentationml/2006/main" xmlns:r="http://schemas.openxmlformats.org/officeDocument/2006/relationships">
-  <p:cSld>
-    <p:bg>
-      <p:bgPr>
-        <a:solidFill>
-          <a:srgbClr val="00FF00"/>
-        </a:solidFill>
-        <a:effectLst/>
-      </p:bgPr>
-    </p:bg>
-    <p:spTree>
-      <p:nvGrpSpPr>
-        <p:cNvPr id="1" name=""/>
-        <p:cNvGrpSpPr/>
-        <p:nvPr/>
-      </p:nvGrpSpPr>
-      <p:grpSpPr/>
-    </p:spTree>
-  </p:cSld>
-  <p:clrMapOvr>
-    <a:masterClrMapping/>
-  </p:clrMapOvr>
-</p:sld>
-</file>
-
-<file path=ppt/slides/slide144.xml><?xml version="1.0" encoding="utf-8"?>
+<file path=ppt/slides/slide156.xml><?xml version="1.0" encoding="utf-8"?>
+<p:sld xmlns:a="http://schemas.openxmlformats.org/drawingml/2006/main" xmlns:p="http://schemas.openxmlformats.org/presentationml/2006/main" xmlns:r="http://schemas.openxmlformats.org/officeDocument/2006/relationships">
+  <p:cSld>
+    <p:bg>
+      <p:bgPr>
+        <a:solidFill>
+          <a:srgbClr val="00FF00"/>
+        </a:solidFill>
+        <a:effectLst/>
+      </p:bgPr>
+    </p:bg>
+    <p:spTree>
+      <p:nvGrpSpPr>
+        <p:cNvPr id="1" name=""/>
+        <p:cNvGrpSpPr/>
+        <p:nvPr/>
+      </p:nvGrpSpPr>
+      <p:grpSpPr/>
+    </p:spTree>
+  </p:cSld>
+  <p:clrMapOvr>
+    <a:masterClrMapping/>
+  </p:clrMapOvr>
+</p:sld>
+</file>
+
+<file path=ppt/slides/slide157.xml><?xml version="1.0" encoding="utf-8"?>
 <p:sld xmlns:a="http://schemas.openxmlformats.org/drawingml/2006/main" xmlns:p="http://schemas.openxmlformats.org/presentationml/2006/main" xmlns:r="http://schemas.openxmlformats.org/officeDocument/2006/relationships">
   <p:cSld>
     <p:bg>
@@ -6483,88 +7392,24 @@
 </p:sld>
 </file>
 
-<file path=ppt/slides/slide145.xml><?xml version="1.0" encoding="utf-8"?>
-<p:sld xmlns:a="http://schemas.openxmlformats.org/drawingml/2006/main" xmlns:p="http://schemas.openxmlformats.org/presentationml/2006/main" xmlns:r="http://schemas.openxmlformats.org/officeDocument/2006/relationships">
-  <p:cSld>
-    <p:bg>
-      <p:bgPr>
-        <a:solidFill>
-          <a:srgbClr val="00FF00"/>
-        </a:solidFill>
-        <a:effectLst/>
-      </p:bgPr>
-    </p:bg>
-    <p:spTree>
-      <p:nvGrpSpPr>
-        <p:cNvPr id="1" name=""/>
-        <p:cNvGrpSpPr/>
-        <p:nvPr/>
-      </p:nvGrpSpPr>
-      <p:grpSpPr/>
-    </p:spTree>
-  </p:cSld>
-  <p:clrMapOvr>
-    <a:masterClrMapping/>
-  </p:clrMapOvr>
-</p:sld>
-</file>
-
-<file path=ppt/slides/slide15.xml><?xml version="1.0" encoding="utf-8"?>
-<p:sld xmlns:a="http://schemas.openxmlformats.org/drawingml/2006/main" xmlns:p="http://schemas.openxmlformats.org/presentationml/2006/main" xmlns:r="http://schemas.openxmlformats.org/officeDocument/2006/relationships">
-  <p:cSld>
-    <p:bg>
-      <p:bgPr>
-        <a:solidFill>
-          <a:srgbClr val="00FF00"/>
-        </a:solidFill>
-        <a:effectLst/>
-      </p:bgPr>
-    </p:bg>
-    <p:spTree>
-      <p:nvGrpSpPr>
-        <p:cNvPr id="1" name=""/>
-        <p:cNvGrpSpPr/>
-        <p:nvPr/>
-      </p:nvGrpSpPr>
-      <p:grpSpPr/>
-      <p:sp>
-        <p:nvSpPr>
-          <p:cNvPr id="2" name="TextBox 1"/>
-          <p:cNvSpPr txBox="1"/>
-          <p:nvPr/>
-        </p:nvSpPr>
-        <p:spPr>
-          <a:xfrm>
-            <a:off x="624059" y="5400000"/>
-            <a:ext cx="10944000" cy="1188000"/>
-          </a:xfrm>
-          <a:prstGeom prst="rect">
-            <a:avLst/>
-          </a:prstGeom>
-          <a:solidFill>
-            <a:srgbClr val="203864"/>
-          </a:solidFill>
-        </p:spPr>
-        <p:txBody>
-          <a:bodyPr wrap="none" anchor="ctr">
-            <a:normAutofit/>
-          </a:bodyPr>
-          <a:lstStyle/>
-          <a:p>
-            <a:pPr algn="ctr">
-              <a:defRPr sz="3500">
-                <a:solidFill>
-                  <a:srgbClr val="FFFFFF"/>
-                </a:solidFill>
-                <a:latin typeface="Pretendard Semibold"/>
-              </a:defRPr>
-            </a:pPr>
-            <a:r>
-              <a:t>죄 있는 자들아 이리로 오라 주 예수 앞에 오라</a:t>
-            </a:r>
-          </a:p>
-        </p:txBody>
-      </p:sp>
+<file path=ppt/slides/slide158.xml><?xml version="1.0" encoding="utf-8"?>
+<p:sld xmlns:a="http://schemas.openxmlformats.org/drawingml/2006/main" xmlns:p="http://schemas.openxmlformats.org/presentationml/2006/main" xmlns:r="http://schemas.openxmlformats.org/officeDocument/2006/relationships">
+  <p:cSld>
+    <p:bg>
+      <p:bgPr>
+        <a:solidFill>
+          <a:srgbClr val="00FF00"/>
+        </a:solidFill>
+        <a:effectLst/>
+      </p:bgPr>
+    </p:bg>
+    <p:spTree>
+      <p:nvGrpSpPr>
+        <p:cNvPr id="1" name=""/>
+        <p:cNvGrpSpPr/>
+        <p:nvPr/>
+      </p:nvGrpSpPr>
+      <p:grpSpPr/>
     </p:spTree>
   </p:cSld>
   <p:clrMapOvr>
